--- a/docs/presentations/EngD_Update_8_Final_Review_September2026_revF.pptx
+++ b/docs/presentations/EngD_Update_8_Final_Review_September2026_revF.pptx
@@ -1506,7 +1506,7 @@
           </a:p>
           <a:p>
             <a:r>
-              <a:t>Tam &amp; Cheung. Accepted and presented March 2026; IEEE Xplore indexing pending. Camera-ready consent-statement check open.</a:t>
+              <a:t>Tam &amp; Cheung. Accepted and presented March 2026; IEEE Xplore indexing pending. Camera-ready consent-statement check done (14 Sep); review form archived — minor formatting changes only, none on consent.</a:t>
             </a:r>
           </a:p>
           <a:p/>
@@ -1538,7 +1538,7 @@
           </a:p>
           <a:p>
             <a:r>
-              <a:t>Two complete submission packages (JMIR Serious Games; IEEE Access alternative). Submission awaits the supervisor's venue approval; co-author ORCID needed for the forms.</a:t>
+              <a:t>Two complete submission packages (JMIR Serious Games; IEEE Access alternative). Submission awaits the supervisor's venue approval; co-author ORCID needed for the forms. JMIR path cleared: ms#111728 withdrawal confirmed by JMIR 14 Sep (Decision E: Withdrawn by Author).</a:t>
             </a:r>
           </a:p>
           <a:p/>
